--- a/DawaiTrack_Report.pptx
+++ b/DawaiTrack_Report.pptx
@@ -19,7 +19,19 @@
     <p:sldId id="269" r:id="rId13"/>
     <p:sldId id="270" r:id="rId14"/>
     <p:sldId id="271" r:id="rId15"/>
-    <p:sldId id="257" r:id="rId16"/>
+    <p:sldId id="284" r:id="rId16"/>
+    <p:sldId id="257" r:id="rId17"/>
+    <p:sldId id="272" r:id="rId18"/>
+    <p:sldId id="273" r:id="rId19"/>
+    <p:sldId id="274" r:id="rId20"/>
+    <p:sldId id="279" r:id="rId21"/>
+    <p:sldId id="275" r:id="rId22"/>
+    <p:sldId id="276" r:id="rId23"/>
+    <p:sldId id="277" r:id="rId24"/>
+    <p:sldId id="280" r:id="rId25"/>
+    <p:sldId id="281" r:id="rId26"/>
+    <p:sldId id="282" r:id="rId27"/>
+    <p:sldId id="283" r:id="rId28"/>
   </p:sldIdLst>
   <p:sldSz cx="12192000" cy="6858000"/>
   <p:notesSz cx="6858000" cy="9144000"/>
@@ -4787,10 +4799,304 @@
           <a:chExt cx="0" cy="0"/>
         </a:xfrm>
       </p:grpSpPr>
+      <p:sp>
+        <p:nvSpPr>
+          <p:cNvPr id="2" name="Title 1">
+            <a:extLst>
+              <a:ext uri="{FF2B5EF4-FFF2-40B4-BE49-F238E27FC236}">
+                <a16:creationId xmlns:a16="http://schemas.microsoft.com/office/drawing/2014/main" id="{CBD41E40-7B78-3E23-2C8E-64343CD6E4A0}"/>
+              </a:ext>
+            </a:extLst>
+          </p:cNvPr>
+          <p:cNvSpPr>
+            <a:spLocks noGrp="1"/>
+          </p:cNvSpPr>
+          <p:nvPr>
+            <p:ph type="title"/>
+          </p:nvPr>
+        </p:nvSpPr>
+        <p:spPr/>
+        <p:txBody>
+          <a:bodyPr/>
+          <a:lstStyle/>
+          <a:p>
+            <a:r>
+              <a:rPr lang="en-US" dirty="0"/>
+              <a:t>Few Screenshots</a:t>
+            </a:r>
+            <a:endParaRPr lang="en-IN" dirty="0"/>
+          </a:p>
+        </p:txBody>
+      </p:sp>
+      <p:sp>
+        <p:nvSpPr>
+          <p:cNvPr id="3" name="Text Placeholder 2">
+            <a:extLst>
+              <a:ext uri="{FF2B5EF4-FFF2-40B4-BE49-F238E27FC236}">
+                <a16:creationId xmlns:a16="http://schemas.microsoft.com/office/drawing/2014/main" id="{37F6FB0D-0710-7701-33E2-1F79022C3C65}"/>
+              </a:ext>
+            </a:extLst>
+          </p:cNvPr>
+          <p:cNvSpPr>
+            <a:spLocks noGrp="1"/>
+          </p:cNvSpPr>
+          <p:nvPr>
+            <p:ph type="body" idx="1"/>
+          </p:nvPr>
+        </p:nvSpPr>
+        <p:spPr/>
+        <p:txBody>
+          <a:bodyPr/>
+          <a:lstStyle/>
+          <a:p>
+            <a:endParaRPr lang="en-IN"/>
+          </a:p>
+        </p:txBody>
+      </p:sp>
+    </p:spTree>
+    <p:extLst>
+      <p:ext uri="{BB962C8B-B14F-4D97-AF65-F5344CB8AC3E}">
+        <p14:creationId xmlns:p14="http://schemas.microsoft.com/office/powerpoint/2010/main" val="1671605341"/>
+      </p:ext>
+    </p:extLst>
+  </p:cSld>
+  <p:clrMapOvr>
+    <a:masterClrMapping/>
+  </p:clrMapOvr>
+</p:sld>
+</file>
+
+<file path=ppt/slides/slide16.xml><?xml version="1.0" encoding="utf-8"?>
+<p:sld xmlns:a="http://schemas.openxmlformats.org/drawingml/2006/main" xmlns:r="http://schemas.openxmlformats.org/officeDocument/2006/relationships" xmlns:p="http://schemas.openxmlformats.org/presentationml/2006/main">
+  <p:cSld>
+    <p:spTree>
+      <p:nvGrpSpPr>
+        <p:cNvPr id="1" name=""/>
+        <p:cNvGrpSpPr/>
+        <p:nvPr/>
+      </p:nvGrpSpPr>
+      <p:grpSpPr>
+        <a:xfrm>
+          <a:off x="0" y="0"/>
+          <a:ext cx="0" cy="0"/>
+          <a:chOff x="0" y="0"/>
+          <a:chExt cx="0" cy="0"/>
+        </a:xfrm>
+      </p:grpSpPr>
+      <p:pic>
+        <p:nvPicPr>
+          <p:cNvPr id="5" name="Picture 4">
+            <a:extLst>
+              <a:ext uri="{FF2B5EF4-FFF2-40B4-BE49-F238E27FC236}">
+                <a16:creationId xmlns:a16="http://schemas.microsoft.com/office/drawing/2014/main" id="{7DE95071-8C89-CA19-F278-EDA0C5ECFABB}"/>
+              </a:ext>
+            </a:extLst>
+          </p:cNvPr>
+          <p:cNvPicPr>
+            <a:picLocks noChangeAspect="1"/>
+          </p:cNvPicPr>
+          <p:nvPr/>
+        </p:nvPicPr>
+        <p:blipFill>
+          <a:blip r:embed="rId2"/>
+          <a:stretch>
+            <a:fillRect/>
+          </a:stretch>
+        </p:blipFill>
+        <p:spPr>
+          <a:xfrm>
+            <a:off x="0" y="0"/>
+            <a:ext cx="12192000" cy="6858000"/>
+          </a:xfrm>
+          <a:prstGeom prst="rect">
+            <a:avLst/>
+          </a:prstGeom>
+        </p:spPr>
+      </p:pic>
     </p:spTree>
     <p:extLst>
       <p:ext uri="{BB962C8B-B14F-4D97-AF65-F5344CB8AC3E}">
         <p14:creationId xmlns:p14="http://schemas.microsoft.com/office/powerpoint/2010/main" val="1017900459"/>
+      </p:ext>
+    </p:extLst>
+  </p:cSld>
+  <p:clrMapOvr>
+    <a:masterClrMapping/>
+  </p:clrMapOvr>
+</p:sld>
+</file>
+
+<file path=ppt/slides/slide17.xml><?xml version="1.0" encoding="utf-8"?>
+<p:sld xmlns:a="http://schemas.openxmlformats.org/drawingml/2006/main" xmlns:r="http://schemas.openxmlformats.org/officeDocument/2006/relationships" xmlns:p="http://schemas.openxmlformats.org/presentationml/2006/main">
+  <p:cSld>
+    <p:spTree>
+      <p:nvGrpSpPr>
+        <p:cNvPr id="1" name=""/>
+        <p:cNvGrpSpPr/>
+        <p:nvPr/>
+      </p:nvGrpSpPr>
+      <p:grpSpPr>
+        <a:xfrm>
+          <a:off x="0" y="0"/>
+          <a:ext cx="0" cy="0"/>
+          <a:chOff x="0" y="0"/>
+          <a:chExt cx="0" cy="0"/>
+        </a:xfrm>
+      </p:grpSpPr>
+      <p:pic>
+        <p:nvPicPr>
+          <p:cNvPr id="3" name="Picture 2">
+            <a:extLst>
+              <a:ext uri="{FF2B5EF4-FFF2-40B4-BE49-F238E27FC236}">
+                <a16:creationId xmlns:a16="http://schemas.microsoft.com/office/drawing/2014/main" id="{A2A55D79-0C6A-0EE3-782E-578E843638B4}"/>
+              </a:ext>
+            </a:extLst>
+          </p:cNvPr>
+          <p:cNvPicPr>
+            <a:picLocks noChangeAspect="1"/>
+          </p:cNvPicPr>
+          <p:nvPr/>
+        </p:nvPicPr>
+        <p:blipFill>
+          <a:blip r:embed="rId2"/>
+          <a:stretch>
+            <a:fillRect/>
+          </a:stretch>
+        </p:blipFill>
+        <p:spPr>
+          <a:xfrm>
+            <a:off x="0" y="0"/>
+            <a:ext cx="12192000" cy="6858000"/>
+          </a:xfrm>
+          <a:prstGeom prst="rect">
+            <a:avLst/>
+          </a:prstGeom>
+        </p:spPr>
+      </p:pic>
+    </p:spTree>
+    <p:extLst>
+      <p:ext uri="{BB962C8B-B14F-4D97-AF65-F5344CB8AC3E}">
+        <p14:creationId xmlns:p14="http://schemas.microsoft.com/office/powerpoint/2010/main" val="55884017"/>
+      </p:ext>
+    </p:extLst>
+  </p:cSld>
+  <p:clrMapOvr>
+    <a:masterClrMapping/>
+  </p:clrMapOvr>
+</p:sld>
+</file>
+
+<file path=ppt/slides/slide18.xml><?xml version="1.0" encoding="utf-8"?>
+<p:sld xmlns:a="http://schemas.openxmlformats.org/drawingml/2006/main" xmlns:r="http://schemas.openxmlformats.org/officeDocument/2006/relationships" xmlns:p="http://schemas.openxmlformats.org/presentationml/2006/main">
+  <p:cSld>
+    <p:spTree>
+      <p:nvGrpSpPr>
+        <p:cNvPr id="1" name=""/>
+        <p:cNvGrpSpPr/>
+        <p:nvPr/>
+      </p:nvGrpSpPr>
+      <p:grpSpPr>
+        <a:xfrm>
+          <a:off x="0" y="0"/>
+          <a:ext cx="0" cy="0"/>
+          <a:chOff x="0" y="0"/>
+          <a:chExt cx="0" cy="0"/>
+        </a:xfrm>
+      </p:grpSpPr>
+      <p:pic>
+        <p:nvPicPr>
+          <p:cNvPr id="3" name="Picture 2">
+            <a:extLst>
+              <a:ext uri="{FF2B5EF4-FFF2-40B4-BE49-F238E27FC236}">
+                <a16:creationId xmlns:a16="http://schemas.microsoft.com/office/drawing/2014/main" id="{2C794808-C8C6-E2A6-778A-CA7990E01646}"/>
+              </a:ext>
+            </a:extLst>
+          </p:cNvPr>
+          <p:cNvPicPr>
+            <a:picLocks noChangeAspect="1"/>
+          </p:cNvPicPr>
+          <p:nvPr/>
+        </p:nvPicPr>
+        <p:blipFill>
+          <a:blip r:embed="rId2"/>
+          <a:stretch>
+            <a:fillRect/>
+          </a:stretch>
+        </p:blipFill>
+        <p:spPr>
+          <a:xfrm>
+            <a:off x="0" y="0"/>
+            <a:ext cx="12192000" cy="6858000"/>
+          </a:xfrm>
+          <a:prstGeom prst="rect">
+            <a:avLst/>
+          </a:prstGeom>
+        </p:spPr>
+      </p:pic>
+    </p:spTree>
+    <p:extLst>
+      <p:ext uri="{BB962C8B-B14F-4D97-AF65-F5344CB8AC3E}">
+        <p14:creationId xmlns:p14="http://schemas.microsoft.com/office/powerpoint/2010/main" val="2301718573"/>
+      </p:ext>
+    </p:extLst>
+  </p:cSld>
+  <p:clrMapOvr>
+    <a:masterClrMapping/>
+  </p:clrMapOvr>
+</p:sld>
+</file>
+
+<file path=ppt/slides/slide19.xml><?xml version="1.0" encoding="utf-8"?>
+<p:sld xmlns:a="http://schemas.openxmlformats.org/drawingml/2006/main" xmlns:r="http://schemas.openxmlformats.org/officeDocument/2006/relationships" xmlns:p="http://schemas.openxmlformats.org/presentationml/2006/main">
+  <p:cSld>
+    <p:spTree>
+      <p:nvGrpSpPr>
+        <p:cNvPr id="1" name=""/>
+        <p:cNvGrpSpPr/>
+        <p:nvPr/>
+      </p:nvGrpSpPr>
+      <p:grpSpPr>
+        <a:xfrm>
+          <a:off x="0" y="0"/>
+          <a:ext cx="0" cy="0"/>
+          <a:chOff x="0" y="0"/>
+          <a:chExt cx="0" cy="0"/>
+        </a:xfrm>
+      </p:grpSpPr>
+      <p:pic>
+        <p:nvPicPr>
+          <p:cNvPr id="3" name="Picture 2">
+            <a:extLst>
+              <a:ext uri="{FF2B5EF4-FFF2-40B4-BE49-F238E27FC236}">
+                <a16:creationId xmlns:a16="http://schemas.microsoft.com/office/drawing/2014/main" id="{F06DB22A-B018-B5FB-52BB-8467D5FD3B26}"/>
+              </a:ext>
+            </a:extLst>
+          </p:cNvPr>
+          <p:cNvPicPr>
+            <a:picLocks noChangeAspect="1"/>
+          </p:cNvPicPr>
+          <p:nvPr/>
+        </p:nvPicPr>
+        <p:blipFill>
+          <a:blip r:embed="rId2"/>
+          <a:stretch>
+            <a:fillRect/>
+          </a:stretch>
+        </p:blipFill>
+        <p:spPr>
+          <a:xfrm>
+            <a:off x="0" y="0"/>
+            <a:ext cx="12192000" cy="6858000"/>
+          </a:xfrm>
+          <a:prstGeom prst="rect">
+            <a:avLst/>
+          </a:prstGeom>
+        </p:spPr>
+      </p:pic>
+    </p:spTree>
+    <p:extLst>
+      <p:ext uri="{BB962C8B-B14F-4D97-AF65-F5344CB8AC3E}">
+        <p14:creationId xmlns:p14="http://schemas.microsoft.com/office/powerpoint/2010/main" val="2775419399"/>
       </p:ext>
     </p:extLst>
   </p:cSld>
@@ -4906,6 +5212,581 @@
     <p:extLst>
       <p:ext uri="{BB962C8B-B14F-4D97-AF65-F5344CB8AC3E}">
         <p14:creationId xmlns:p14="http://schemas.microsoft.com/office/powerpoint/2010/main" val="3729738381"/>
+      </p:ext>
+    </p:extLst>
+  </p:cSld>
+  <p:clrMapOvr>
+    <a:masterClrMapping/>
+  </p:clrMapOvr>
+</p:sld>
+</file>
+
+<file path=ppt/slides/slide20.xml><?xml version="1.0" encoding="utf-8"?>
+<p:sld xmlns:a="http://schemas.openxmlformats.org/drawingml/2006/main" xmlns:r="http://schemas.openxmlformats.org/officeDocument/2006/relationships" xmlns:p="http://schemas.openxmlformats.org/presentationml/2006/main">
+  <p:cSld>
+    <p:spTree>
+      <p:nvGrpSpPr>
+        <p:cNvPr id="1" name="">
+          <a:extLst>
+            <a:ext uri="{FF2B5EF4-FFF2-40B4-BE49-F238E27FC236}">
+              <a16:creationId xmlns:a16="http://schemas.microsoft.com/office/drawing/2014/main" id="{06C2572F-079A-31B5-C5C7-E12DC81844C3}"/>
+            </a:ext>
+          </a:extLst>
+        </p:cNvPr>
+        <p:cNvGrpSpPr/>
+        <p:nvPr/>
+      </p:nvGrpSpPr>
+      <p:grpSpPr>
+        <a:xfrm>
+          <a:off x="0" y="0"/>
+          <a:ext cx="0" cy="0"/>
+          <a:chOff x="0" y="0"/>
+          <a:chExt cx="0" cy="0"/>
+        </a:xfrm>
+      </p:grpSpPr>
+      <p:pic>
+        <p:nvPicPr>
+          <p:cNvPr id="3" name="Picture 2">
+            <a:extLst>
+              <a:ext uri="{FF2B5EF4-FFF2-40B4-BE49-F238E27FC236}">
+                <a16:creationId xmlns:a16="http://schemas.microsoft.com/office/drawing/2014/main" id="{DB35FD19-18C8-6A5C-6A53-539B73511161}"/>
+              </a:ext>
+            </a:extLst>
+          </p:cNvPr>
+          <p:cNvPicPr>
+            <a:picLocks noChangeAspect="1"/>
+          </p:cNvPicPr>
+          <p:nvPr/>
+        </p:nvPicPr>
+        <p:blipFill>
+          <a:blip r:embed="rId2"/>
+          <a:stretch>
+            <a:fillRect/>
+          </a:stretch>
+        </p:blipFill>
+        <p:spPr>
+          <a:xfrm>
+            <a:off x="0" y="0"/>
+            <a:ext cx="12192000" cy="6858000"/>
+          </a:xfrm>
+          <a:prstGeom prst="rect">
+            <a:avLst/>
+          </a:prstGeom>
+        </p:spPr>
+      </p:pic>
+    </p:spTree>
+    <p:extLst>
+      <p:ext uri="{BB962C8B-B14F-4D97-AF65-F5344CB8AC3E}">
+        <p14:creationId xmlns:p14="http://schemas.microsoft.com/office/powerpoint/2010/main" val="660456825"/>
+      </p:ext>
+    </p:extLst>
+  </p:cSld>
+  <p:clrMapOvr>
+    <a:masterClrMapping/>
+  </p:clrMapOvr>
+</p:sld>
+</file>
+
+<file path=ppt/slides/slide21.xml><?xml version="1.0" encoding="utf-8"?>
+<p:sld xmlns:a="http://schemas.openxmlformats.org/drawingml/2006/main" xmlns:r="http://schemas.openxmlformats.org/officeDocument/2006/relationships" xmlns:p="http://schemas.openxmlformats.org/presentationml/2006/main">
+  <p:cSld>
+    <p:spTree>
+      <p:nvGrpSpPr>
+        <p:cNvPr id="1" name="">
+          <a:extLst>
+            <a:ext uri="{FF2B5EF4-FFF2-40B4-BE49-F238E27FC236}">
+              <a16:creationId xmlns:a16="http://schemas.microsoft.com/office/drawing/2014/main" id="{91742D14-1D37-E0BE-B0CE-39CBCC2C71CB}"/>
+            </a:ext>
+          </a:extLst>
+        </p:cNvPr>
+        <p:cNvGrpSpPr/>
+        <p:nvPr/>
+      </p:nvGrpSpPr>
+      <p:grpSpPr>
+        <a:xfrm>
+          <a:off x="0" y="0"/>
+          <a:ext cx="0" cy="0"/>
+          <a:chOff x="0" y="0"/>
+          <a:chExt cx="0" cy="0"/>
+        </a:xfrm>
+      </p:grpSpPr>
+      <p:pic>
+        <p:nvPicPr>
+          <p:cNvPr id="3" name="Picture 2">
+            <a:extLst>
+              <a:ext uri="{FF2B5EF4-FFF2-40B4-BE49-F238E27FC236}">
+                <a16:creationId xmlns:a16="http://schemas.microsoft.com/office/drawing/2014/main" id="{A38333CF-B9DD-C159-FBC1-AD7E957AF659}"/>
+              </a:ext>
+            </a:extLst>
+          </p:cNvPr>
+          <p:cNvPicPr>
+            <a:picLocks noChangeAspect="1"/>
+          </p:cNvPicPr>
+          <p:nvPr/>
+        </p:nvPicPr>
+        <p:blipFill>
+          <a:blip r:embed="rId2"/>
+          <a:stretch>
+            <a:fillRect/>
+          </a:stretch>
+        </p:blipFill>
+        <p:spPr>
+          <a:xfrm>
+            <a:off x="0" y="0"/>
+            <a:ext cx="12192000" cy="6858000"/>
+          </a:xfrm>
+          <a:prstGeom prst="rect">
+            <a:avLst/>
+          </a:prstGeom>
+        </p:spPr>
+      </p:pic>
+    </p:spTree>
+    <p:extLst>
+      <p:ext uri="{BB962C8B-B14F-4D97-AF65-F5344CB8AC3E}">
+        <p14:creationId xmlns:p14="http://schemas.microsoft.com/office/powerpoint/2010/main" val="2320297185"/>
+      </p:ext>
+    </p:extLst>
+  </p:cSld>
+  <p:clrMapOvr>
+    <a:masterClrMapping/>
+  </p:clrMapOvr>
+</p:sld>
+</file>
+
+<file path=ppt/slides/slide22.xml><?xml version="1.0" encoding="utf-8"?>
+<p:sld xmlns:a="http://schemas.openxmlformats.org/drawingml/2006/main" xmlns:r="http://schemas.openxmlformats.org/officeDocument/2006/relationships" xmlns:p="http://schemas.openxmlformats.org/presentationml/2006/main">
+  <p:cSld>
+    <p:spTree>
+      <p:nvGrpSpPr>
+        <p:cNvPr id="1" name="">
+          <a:extLst>
+            <a:ext uri="{FF2B5EF4-FFF2-40B4-BE49-F238E27FC236}">
+              <a16:creationId xmlns:a16="http://schemas.microsoft.com/office/drawing/2014/main" id="{7D00BB76-8579-4DAD-135B-B1D052108320}"/>
+            </a:ext>
+          </a:extLst>
+        </p:cNvPr>
+        <p:cNvGrpSpPr/>
+        <p:nvPr/>
+      </p:nvGrpSpPr>
+      <p:grpSpPr>
+        <a:xfrm>
+          <a:off x="0" y="0"/>
+          <a:ext cx="0" cy="0"/>
+          <a:chOff x="0" y="0"/>
+          <a:chExt cx="0" cy="0"/>
+        </a:xfrm>
+      </p:grpSpPr>
+      <p:pic>
+        <p:nvPicPr>
+          <p:cNvPr id="3" name="Picture 2">
+            <a:extLst>
+              <a:ext uri="{FF2B5EF4-FFF2-40B4-BE49-F238E27FC236}">
+                <a16:creationId xmlns:a16="http://schemas.microsoft.com/office/drawing/2014/main" id="{351B2632-80A1-2D10-2168-A6FC0D25C095}"/>
+              </a:ext>
+            </a:extLst>
+          </p:cNvPr>
+          <p:cNvPicPr>
+            <a:picLocks noChangeAspect="1"/>
+          </p:cNvPicPr>
+          <p:nvPr/>
+        </p:nvPicPr>
+        <p:blipFill>
+          <a:blip r:embed="rId2"/>
+          <a:stretch>
+            <a:fillRect/>
+          </a:stretch>
+        </p:blipFill>
+        <p:spPr>
+          <a:xfrm>
+            <a:off x="0" y="0"/>
+            <a:ext cx="12192000" cy="6858000"/>
+          </a:xfrm>
+          <a:prstGeom prst="rect">
+            <a:avLst/>
+          </a:prstGeom>
+        </p:spPr>
+      </p:pic>
+    </p:spTree>
+    <p:extLst>
+      <p:ext uri="{BB962C8B-B14F-4D97-AF65-F5344CB8AC3E}">
+        <p14:creationId xmlns:p14="http://schemas.microsoft.com/office/powerpoint/2010/main" val="2619416744"/>
+      </p:ext>
+    </p:extLst>
+  </p:cSld>
+  <p:clrMapOvr>
+    <a:masterClrMapping/>
+  </p:clrMapOvr>
+</p:sld>
+</file>
+
+<file path=ppt/slides/slide23.xml><?xml version="1.0" encoding="utf-8"?>
+<p:sld xmlns:a="http://schemas.openxmlformats.org/drawingml/2006/main" xmlns:r="http://schemas.openxmlformats.org/officeDocument/2006/relationships" xmlns:p="http://schemas.openxmlformats.org/presentationml/2006/main">
+  <p:cSld>
+    <p:spTree>
+      <p:nvGrpSpPr>
+        <p:cNvPr id="1" name="">
+          <a:extLst>
+            <a:ext uri="{FF2B5EF4-FFF2-40B4-BE49-F238E27FC236}">
+              <a16:creationId xmlns:a16="http://schemas.microsoft.com/office/drawing/2014/main" id="{3BCEFC1C-90DA-9D1F-962A-DDB40ABF5F4B}"/>
+            </a:ext>
+          </a:extLst>
+        </p:cNvPr>
+        <p:cNvGrpSpPr/>
+        <p:nvPr/>
+      </p:nvGrpSpPr>
+      <p:grpSpPr>
+        <a:xfrm>
+          <a:off x="0" y="0"/>
+          <a:ext cx="0" cy="0"/>
+          <a:chOff x="0" y="0"/>
+          <a:chExt cx="0" cy="0"/>
+        </a:xfrm>
+      </p:grpSpPr>
+      <p:pic>
+        <p:nvPicPr>
+          <p:cNvPr id="3" name="Picture 2">
+            <a:extLst>
+              <a:ext uri="{FF2B5EF4-FFF2-40B4-BE49-F238E27FC236}">
+                <a16:creationId xmlns:a16="http://schemas.microsoft.com/office/drawing/2014/main" id="{82B9E178-E5C7-1D4A-4A9E-575B1D0EE849}"/>
+              </a:ext>
+            </a:extLst>
+          </p:cNvPr>
+          <p:cNvPicPr>
+            <a:picLocks noChangeAspect="1"/>
+          </p:cNvPicPr>
+          <p:nvPr/>
+        </p:nvPicPr>
+        <p:blipFill>
+          <a:blip r:embed="rId2"/>
+          <a:stretch>
+            <a:fillRect/>
+          </a:stretch>
+        </p:blipFill>
+        <p:spPr>
+          <a:xfrm>
+            <a:off x="0" y="0"/>
+            <a:ext cx="12192000" cy="6858000"/>
+          </a:xfrm>
+          <a:prstGeom prst="rect">
+            <a:avLst/>
+          </a:prstGeom>
+        </p:spPr>
+      </p:pic>
+    </p:spTree>
+    <p:extLst>
+      <p:ext uri="{BB962C8B-B14F-4D97-AF65-F5344CB8AC3E}">
+        <p14:creationId xmlns:p14="http://schemas.microsoft.com/office/powerpoint/2010/main" val="1627704614"/>
+      </p:ext>
+    </p:extLst>
+  </p:cSld>
+  <p:clrMapOvr>
+    <a:masterClrMapping/>
+  </p:clrMapOvr>
+</p:sld>
+</file>
+
+<file path=ppt/slides/slide24.xml><?xml version="1.0" encoding="utf-8"?>
+<p:sld xmlns:a="http://schemas.openxmlformats.org/drawingml/2006/main" xmlns:r="http://schemas.openxmlformats.org/officeDocument/2006/relationships" xmlns:p="http://schemas.openxmlformats.org/presentationml/2006/main">
+  <p:cSld>
+    <p:spTree>
+      <p:nvGrpSpPr>
+        <p:cNvPr id="1" name="">
+          <a:extLst>
+            <a:ext uri="{FF2B5EF4-FFF2-40B4-BE49-F238E27FC236}">
+              <a16:creationId xmlns:a16="http://schemas.microsoft.com/office/drawing/2014/main" id="{E2A2D85B-D2CB-A22D-188D-86B4405331F4}"/>
+            </a:ext>
+          </a:extLst>
+        </p:cNvPr>
+        <p:cNvGrpSpPr/>
+        <p:nvPr/>
+      </p:nvGrpSpPr>
+      <p:grpSpPr>
+        <a:xfrm>
+          <a:off x="0" y="0"/>
+          <a:ext cx="0" cy="0"/>
+          <a:chOff x="0" y="0"/>
+          <a:chExt cx="0" cy="0"/>
+        </a:xfrm>
+      </p:grpSpPr>
+      <p:pic>
+        <p:nvPicPr>
+          <p:cNvPr id="3" name="Picture 2">
+            <a:extLst>
+              <a:ext uri="{FF2B5EF4-FFF2-40B4-BE49-F238E27FC236}">
+                <a16:creationId xmlns:a16="http://schemas.microsoft.com/office/drawing/2014/main" id="{20719D28-5860-7588-F230-054401A2E8BE}"/>
+              </a:ext>
+            </a:extLst>
+          </p:cNvPr>
+          <p:cNvPicPr>
+            <a:picLocks noChangeAspect="1"/>
+          </p:cNvPicPr>
+          <p:nvPr/>
+        </p:nvPicPr>
+        <p:blipFill>
+          <a:blip r:embed="rId2"/>
+          <a:stretch>
+            <a:fillRect/>
+          </a:stretch>
+        </p:blipFill>
+        <p:spPr>
+          <a:xfrm>
+            <a:off x="0" y="353961"/>
+            <a:ext cx="10225548" cy="5751871"/>
+          </a:xfrm>
+          <a:prstGeom prst="rect">
+            <a:avLst/>
+          </a:prstGeom>
+        </p:spPr>
+      </p:pic>
+      <p:pic>
+        <p:nvPicPr>
+          <p:cNvPr id="5" name="Picture 4">
+            <a:extLst>
+              <a:ext uri="{FF2B5EF4-FFF2-40B4-BE49-F238E27FC236}">
+                <a16:creationId xmlns:a16="http://schemas.microsoft.com/office/drawing/2014/main" id="{141615F4-61EF-2D32-BA47-DD015A8351A3}"/>
+              </a:ext>
+            </a:extLst>
+          </p:cNvPr>
+          <p:cNvPicPr>
+            <a:picLocks noChangeAspect="1"/>
+          </p:cNvPicPr>
+          <p:nvPr/>
+        </p:nvPicPr>
+        <p:blipFill>
+          <a:blip r:embed="rId3"/>
+          <a:stretch>
+            <a:fillRect/>
+          </a:stretch>
+        </p:blipFill>
+        <p:spPr>
+          <a:xfrm>
+            <a:off x="9470643" y="208018"/>
+            <a:ext cx="2721357" cy="6296021"/>
+          </a:xfrm>
+          <a:prstGeom prst="rect">
+            <a:avLst/>
+          </a:prstGeom>
+          <a:ln>
+            <a:solidFill>
+              <a:schemeClr val="tx1"/>
+            </a:solidFill>
+          </a:ln>
+        </p:spPr>
+      </p:pic>
+    </p:spTree>
+    <p:extLst>
+      <p:ext uri="{BB962C8B-B14F-4D97-AF65-F5344CB8AC3E}">
+        <p14:creationId xmlns:p14="http://schemas.microsoft.com/office/powerpoint/2010/main" val="2475047044"/>
+      </p:ext>
+    </p:extLst>
+  </p:cSld>
+  <p:clrMapOvr>
+    <a:masterClrMapping/>
+  </p:clrMapOvr>
+</p:sld>
+</file>
+
+<file path=ppt/slides/slide25.xml><?xml version="1.0" encoding="utf-8"?>
+<p:sld xmlns:a="http://schemas.openxmlformats.org/drawingml/2006/main" xmlns:r="http://schemas.openxmlformats.org/officeDocument/2006/relationships" xmlns:p="http://schemas.openxmlformats.org/presentationml/2006/main">
+  <p:cSld>
+    <p:spTree>
+      <p:nvGrpSpPr>
+        <p:cNvPr id="1" name=""/>
+        <p:cNvGrpSpPr/>
+        <p:nvPr/>
+      </p:nvGrpSpPr>
+      <p:grpSpPr>
+        <a:xfrm>
+          <a:off x="0" y="0"/>
+          <a:ext cx="0" cy="0"/>
+          <a:chOff x="0" y="0"/>
+          <a:chExt cx="0" cy="0"/>
+        </a:xfrm>
+      </p:grpSpPr>
+      <p:pic>
+        <p:nvPicPr>
+          <p:cNvPr id="3" name="Picture 2">
+            <a:extLst>
+              <a:ext uri="{FF2B5EF4-FFF2-40B4-BE49-F238E27FC236}">
+                <a16:creationId xmlns:a16="http://schemas.microsoft.com/office/drawing/2014/main" id="{37BD83CC-2ADC-E776-3B52-A09A61D135A3}"/>
+              </a:ext>
+            </a:extLst>
+          </p:cNvPr>
+          <p:cNvPicPr>
+            <a:picLocks noChangeAspect="1"/>
+          </p:cNvPicPr>
+          <p:nvPr/>
+        </p:nvPicPr>
+        <p:blipFill>
+          <a:blip r:embed="rId2"/>
+          <a:stretch>
+            <a:fillRect/>
+          </a:stretch>
+        </p:blipFill>
+        <p:spPr>
+          <a:xfrm>
+            <a:off x="0" y="0"/>
+            <a:ext cx="12192000" cy="6858000"/>
+          </a:xfrm>
+          <a:prstGeom prst="rect">
+            <a:avLst/>
+          </a:prstGeom>
+        </p:spPr>
+      </p:pic>
+    </p:spTree>
+    <p:extLst>
+      <p:ext uri="{BB962C8B-B14F-4D97-AF65-F5344CB8AC3E}">
+        <p14:creationId xmlns:p14="http://schemas.microsoft.com/office/powerpoint/2010/main" val="674820191"/>
+      </p:ext>
+    </p:extLst>
+  </p:cSld>
+  <p:clrMapOvr>
+    <a:masterClrMapping/>
+  </p:clrMapOvr>
+</p:sld>
+</file>
+
+<file path=ppt/slides/slide26.xml><?xml version="1.0" encoding="utf-8"?>
+<p:sld xmlns:a="http://schemas.openxmlformats.org/drawingml/2006/main" xmlns:r="http://schemas.openxmlformats.org/officeDocument/2006/relationships" xmlns:p="http://schemas.openxmlformats.org/presentationml/2006/main">
+  <p:cSld>
+    <p:spTree>
+      <p:nvGrpSpPr>
+        <p:cNvPr id="1" name="">
+          <a:extLst>
+            <a:ext uri="{FF2B5EF4-FFF2-40B4-BE49-F238E27FC236}">
+              <a16:creationId xmlns:a16="http://schemas.microsoft.com/office/drawing/2014/main" id="{E3E45BB9-8186-0AC9-558F-59E69DB63053}"/>
+            </a:ext>
+          </a:extLst>
+        </p:cNvPr>
+        <p:cNvGrpSpPr/>
+        <p:nvPr/>
+      </p:nvGrpSpPr>
+      <p:grpSpPr>
+        <a:xfrm>
+          <a:off x="0" y="0"/>
+          <a:ext cx="0" cy="0"/>
+          <a:chOff x="0" y="0"/>
+          <a:chExt cx="0" cy="0"/>
+        </a:xfrm>
+      </p:grpSpPr>
+      <p:pic>
+        <p:nvPicPr>
+          <p:cNvPr id="4" name="Picture 3">
+            <a:extLst>
+              <a:ext uri="{FF2B5EF4-FFF2-40B4-BE49-F238E27FC236}">
+                <a16:creationId xmlns:a16="http://schemas.microsoft.com/office/drawing/2014/main" id="{92F1FF33-FB6D-88F9-A143-BDE571F5F11F}"/>
+              </a:ext>
+            </a:extLst>
+          </p:cNvPr>
+          <p:cNvPicPr>
+            <a:picLocks noChangeAspect="1"/>
+          </p:cNvPicPr>
+          <p:nvPr/>
+        </p:nvPicPr>
+        <p:blipFill>
+          <a:blip r:embed="rId2"/>
+          <a:stretch>
+            <a:fillRect/>
+          </a:stretch>
+        </p:blipFill>
+        <p:spPr>
+          <a:xfrm>
+            <a:off x="0" y="0"/>
+            <a:ext cx="12192000" cy="6858000"/>
+          </a:xfrm>
+          <a:prstGeom prst="rect">
+            <a:avLst/>
+          </a:prstGeom>
+        </p:spPr>
+      </p:pic>
+    </p:spTree>
+    <p:extLst>
+      <p:ext uri="{BB962C8B-B14F-4D97-AF65-F5344CB8AC3E}">
+        <p14:creationId xmlns:p14="http://schemas.microsoft.com/office/powerpoint/2010/main" val="2441389403"/>
+      </p:ext>
+    </p:extLst>
+  </p:cSld>
+  <p:clrMapOvr>
+    <a:masterClrMapping/>
+  </p:clrMapOvr>
+</p:sld>
+</file>
+
+<file path=ppt/slides/slide27.xml><?xml version="1.0" encoding="utf-8"?>
+<p:sld xmlns:a="http://schemas.openxmlformats.org/drawingml/2006/main" xmlns:r="http://schemas.openxmlformats.org/officeDocument/2006/relationships" xmlns:p="http://schemas.openxmlformats.org/presentationml/2006/main">
+  <p:cSld>
+    <p:spTree>
+      <p:nvGrpSpPr>
+        <p:cNvPr id="1" name=""/>
+        <p:cNvGrpSpPr/>
+        <p:nvPr/>
+      </p:nvGrpSpPr>
+      <p:grpSpPr>
+        <a:xfrm>
+          <a:off x="0" y="0"/>
+          <a:ext cx="0" cy="0"/>
+          <a:chOff x="0" y="0"/>
+          <a:chExt cx="0" cy="0"/>
+        </a:xfrm>
+      </p:grpSpPr>
+      <p:sp>
+        <p:nvSpPr>
+          <p:cNvPr id="2" name="Title 1">
+            <a:extLst>
+              <a:ext uri="{FF2B5EF4-FFF2-40B4-BE49-F238E27FC236}">
+                <a16:creationId xmlns:a16="http://schemas.microsoft.com/office/drawing/2014/main" id="{51DC544D-F5D5-C0AB-C2B4-C491BEC2809B}"/>
+              </a:ext>
+            </a:extLst>
+          </p:cNvPr>
+          <p:cNvSpPr>
+            <a:spLocks noGrp="1"/>
+          </p:cNvSpPr>
+          <p:nvPr>
+            <p:ph type="title"/>
+          </p:nvPr>
+        </p:nvSpPr>
+        <p:spPr/>
+        <p:txBody>
+          <a:bodyPr/>
+          <a:lstStyle/>
+          <a:p>
+            <a:r>
+              <a:rPr lang="en-US" dirty="0"/>
+              <a:t>THANK YOU</a:t>
+            </a:r>
+            <a:endParaRPr lang="en-IN" dirty="0"/>
+          </a:p>
+        </p:txBody>
+      </p:sp>
+      <p:sp>
+        <p:nvSpPr>
+          <p:cNvPr id="3" name="Text Placeholder 2">
+            <a:extLst>
+              <a:ext uri="{FF2B5EF4-FFF2-40B4-BE49-F238E27FC236}">
+                <a16:creationId xmlns:a16="http://schemas.microsoft.com/office/drawing/2014/main" id="{E6D7EC87-5E8A-E334-1B12-A0C1B3B0A247}"/>
+              </a:ext>
+            </a:extLst>
+          </p:cNvPr>
+          <p:cNvSpPr>
+            <a:spLocks noGrp="1"/>
+          </p:cNvSpPr>
+          <p:nvPr>
+            <p:ph type="body" idx="1"/>
+          </p:nvPr>
+        </p:nvSpPr>
+        <p:spPr/>
+        <p:txBody>
+          <a:bodyPr/>
+          <a:lstStyle/>
+          <a:p>
+            <a:endParaRPr lang="en-IN"/>
+          </a:p>
+        </p:txBody>
+      </p:sp>
+    </p:spTree>
+    <p:extLst>
+      <p:ext uri="{BB962C8B-B14F-4D97-AF65-F5344CB8AC3E}">
+        <p14:creationId xmlns:p14="http://schemas.microsoft.com/office/powerpoint/2010/main" val="1396153325"/>
       </p:ext>
     </p:extLst>
   </p:cSld>
